--- a/Rwanda MINECOFIN-GIZ project 2026/1 Lectures/1.1.Recap Rwanda SAM Toolkit.pptx
+++ b/Rwanda MINECOFIN-GIZ project 2026/1 Lectures/1.1.Recap Rwanda SAM Toolkit.pptx
@@ -241,7 +241,7 @@
           <a:p>
             <a:fld id="{2508C934-C7E8-4610-B2C7-5E22C7639776}" type="datetimeFigureOut">
               <a:rPr lang="en-US" smtClean="0"/>
-              <a:t>11/5/2020</a:t>
+              <a:t>2/3/2026</a:t>
             </a:fld>
             <a:endParaRPr lang="en-US"/>
           </a:p>
@@ -900,7 +900,7 @@
           <a:p>
             <a:fld id="{039FD7E3-E8B7-41B6-8E11-9BF22DB8AD7D}" type="datetimeFigureOut">
               <a:rPr lang="en-US" smtClean="0"/>
-              <a:t>11/5/2020</a:t>
+              <a:t>2/3/2026</a:t>
             </a:fld>
             <a:endParaRPr lang="en-US"/>
           </a:p>
@@ -1104,7 +1104,7 @@
           <a:p>
             <a:fld id="{039FD7E3-E8B7-41B6-8E11-9BF22DB8AD7D}" type="datetimeFigureOut">
               <a:rPr lang="en-US" smtClean="0"/>
-              <a:t>11/5/2020</a:t>
+              <a:t>2/3/2026</a:t>
             </a:fld>
             <a:endParaRPr lang="en-US"/>
           </a:p>
@@ -1981,7 +1981,7 @@
           <a:p>
             <a:fld id="{039FD7E3-E8B7-41B6-8E11-9BF22DB8AD7D}" type="datetimeFigureOut">
               <a:rPr lang="en-US" smtClean="0"/>
-              <a:t>11/5/2020</a:t>
+              <a:t>2/3/2026</a:t>
             </a:fld>
             <a:endParaRPr lang="en-US"/>
           </a:p>
@@ -2372,7 +2372,7 @@
           <a:p>
             <a:fld id="{039FD7E3-E8B7-41B6-8E11-9BF22DB8AD7D}" type="datetimeFigureOut">
               <a:rPr lang="en-US" smtClean="0"/>
-              <a:t>11/5/2020</a:t>
+              <a:t>2/3/2026</a:t>
             </a:fld>
             <a:endParaRPr lang="en-US"/>
           </a:p>
@@ -2514,7 +2514,7 @@
           <a:p>
             <a:fld id="{039FD7E3-E8B7-41B6-8E11-9BF22DB8AD7D}" type="datetimeFigureOut">
               <a:rPr lang="en-US" smtClean="0"/>
-              <a:t>11/5/2020</a:t>
+              <a:t>2/3/2026</a:t>
             </a:fld>
             <a:endParaRPr lang="en-US"/>
           </a:p>
@@ -2633,7 +2633,7 @@
           <a:p>
             <a:fld id="{039FD7E3-E8B7-41B6-8E11-9BF22DB8AD7D}" type="datetimeFigureOut">
               <a:rPr lang="en-US" smtClean="0"/>
-              <a:t>11/5/2020</a:t>
+              <a:t>2/3/2026</a:t>
             </a:fld>
             <a:endParaRPr lang="en-US"/>
           </a:p>
@@ -2934,7 +2934,7 @@
           <a:p>
             <a:fld id="{039FD7E3-E8B7-41B6-8E11-9BF22DB8AD7D}" type="datetimeFigureOut">
               <a:rPr lang="en-US" smtClean="0"/>
-              <a:t>11/5/2020</a:t>
+              <a:t>2/3/2026</a:t>
             </a:fld>
             <a:endParaRPr lang="en-US"/>
           </a:p>
@@ -3215,7 +3215,7 @@
           <a:p>
             <a:fld id="{039FD7E3-E8B7-41B6-8E11-9BF22DB8AD7D}" type="datetimeFigureOut">
               <a:rPr lang="en-US" smtClean="0"/>
-              <a:t>11/5/2020</a:t>
+              <a:t>2/3/2026</a:t>
             </a:fld>
             <a:endParaRPr lang="en-US"/>
           </a:p>
